--- a/SIH2026_PS26153_Presentation.pptx
+++ b/SIH2026_PS26153_Presentation.pptx
@@ -8787,7 +8787,7 @@
                           </a:solidFill>
                           <a:latin typeface="Arial"/>
                         </a:rPr>
-                        <a:t>Model (temporal split)</a:t>
+                        <a:t>Sustained compromise, temporal split</a:t>
                       </a:r>
                     </a:p>
                   </a:txBody>
@@ -9446,7 +9446,7 @@
               </a:spcAft>
             </a:pPr>
             <a:r>
-              <a:rPr sz="1100" b="1">
+              <a:rPr sz="1050" b="1">
                 <a:solidFill>
                   <a:srgbClr val="1F497D"/>
                 </a:solidFill>
@@ -9462,7 +9462,7 @@
               </a:spcAft>
             </a:pPr>
             <a:r>
-              <a:rPr sz="900">
+              <a:rPr sz="850">
                 <a:solidFill>
                   <a:srgbClr val="5A6478"/>
                 </a:solidFill>
@@ -9478,7 +9478,7 @@
               </a:spcAft>
             </a:pPr>
             <a:r>
-              <a:rPr sz="1100" b="1">
+              <a:rPr sz="1050" b="1">
                 <a:solidFill>
                   <a:srgbClr val="1F497D"/>
                 </a:solidFill>
@@ -9494,7 +9494,7 @@
               </a:spcAft>
             </a:pPr>
             <a:r>
-              <a:rPr sz="900">
+              <a:rPr sz="850">
                 <a:solidFill>
                   <a:srgbClr val="5A6478"/>
                 </a:solidFill>
@@ -9510,7 +9510,7 @@
               </a:spcAft>
             </a:pPr>
             <a:r>
-              <a:rPr sz="1100" b="1">
+              <a:rPr sz="1050" b="1">
                 <a:solidFill>
                   <a:srgbClr val="1F497D"/>
                 </a:solidFill>
@@ -9526,7 +9526,7 @@
               </a:spcAft>
             </a:pPr>
             <a:r>
-              <a:rPr sz="900">
+              <a:rPr sz="850">
                 <a:solidFill>
                   <a:srgbClr val="5A6478"/>
                 </a:solidFill>
@@ -9542,13 +9542,13 @@
               </a:spcAft>
             </a:pPr>
             <a:r>
-              <a:rPr sz="1100" b="1">
+              <a:rPr sz="1050" b="1">
                 <a:solidFill>
                   <a:srgbClr val="1F497D"/>
                 </a:solidFill>
                 <a:latin typeface="Arial"/>
               </a:rPr>
-              <a:t>Class imbalance (0.8% positive)</a:t>
+              <a:t>Short-burst compromise is missed</a:t>
             </a:r>
           </a:p>
           <a:p>
@@ -9558,7 +9558,39 @@
               </a:spcAft>
             </a:pPr>
             <a:r>
-              <a:rPr sz="900">
+              <a:rPr sz="850">
+                <a:solidFill>
+                  <a:srgbClr val="5A6478"/>
+                </a:solidFill>
+                <a:latin typeface="Arial"/>
+              </a:rPr>
+              <a:t>    Same IP scores 1.000 with 284 malicious windows and 0.000 with 20 → not memorisation, a dependence on sustained activity; F1 above is for sustained compromise</a:t>
+            </a:r>
+          </a:p>
+          <a:p>
+            <a:pPr algn="l">
+              <a:spcAft>
+                <a:spcPts val="400"/>
+              </a:spcAft>
+            </a:pPr>
+            <a:r>
+              <a:rPr sz="1050" b="1">
+                <a:solidFill>
+                  <a:srgbClr val="1F497D"/>
+                </a:solidFill>
+                <a:latin typeface="Arial"/>
+              </a:rPr>
+              <a:t>Class imbalance (0.8% positive)</a:t>
+            </a:r>
+          </a:p>
+          <a:p>
+            <a:pPr algn="l">
+              <a:spcAft>
+                <a:spcPts val="400"/>
+              </a:spcAft>
+            </a:pPr>
+            <a:r>
+              <a:rPr sz="850">
                 <a:solidFill>
                   <a:srgbClr val="5A6478"/>
                 </a:solidFill>

--- a/SIH2026_PS26153_Presentation.pptx
+++ b/SIH2026_PS26153_Presentation.pptx
@@ -9548,7 +9548,7 @@
                 </a:solidFill>
                 <a:latin typeface="Arial"/>
               </a:rPr>
-              <a:t>Short-burst compromise is missed</a:t>
+              <a:t>Supervised head misses short bursts</a:t>
             </a:r>
           </a:p>
           <a:p>
@@ -9564,7 +9564,7 @@
                 </a:solidFill>
                 <a:latin typeface="Arial"/>
               </a:rPr>
-              <a:t>    Same IP scores 1.000 with 284 malicious windows and 0.000 with 20 → not memorisation, a dependence on sustained activity; F1 above is for sustained compromise</a:t>
+              <a:t>    Same IP scores 1.000 with 284 malicious windows and 0.000 with 20 → a dependence on sustained activity. The unsupervised surprise channel covers exactly that gap (ROC-AUC 1.000 on scenario 10's ten short-burst hosts), so triage flags on either → 14/16 hosts caught, 4.1% false alarms</a:t>
             </a:r>
           </a:p>
           <a:p>

--- a/SIH2026_PS26153_Presentation.pptx
+++ b/SIH2026_PS26153_Presentation.pptx
@@ -6743,7 +6743,7 @@
                 </a:solidFill>
                 <a:latin typeface="Arial"/>
               </a:rPr>
-              <a:t>Working prototype today  •  95,518 network states from 2.8M real flows  •  F1 0.984 vs 0.744 for the strongest baseline  •  149 hosts triaged in 0.5 s  •  minute-by-minute replay of the forecast</a:t>
+              <a:t>Working prototype today  •  258,229 network states from all 13 CTU-13 captures  •  28 of 30 infected hosts flagged at 4.9% false alarms •  transfers to unseen malware families  •  runs offline on CPU</a:t>
             </a:r>
           </a:p>
         </p:txBody>
@@ -8744,7 +8744,7 @@
                 </a:solidFill>
                 <a:latin typeface="Arial"/>
               </a:rPr>
-              <a:t>Feasibility — already built and measured</a:t>
+              <a:t>Feasibility — where the model actually wins</a:t>
             </a:r>
           </a:p>
         </p:txBody>
@@ -8787,7 +8787,7 @@
                           </a:solidFill>
                           <a:latin typeface="Arial"/>
                         </a:rPr>
-                        <a:t>Sustained compromise, temporal split</a:t>
+                        <a:t>Stage forecast, macro-F1 by horizon</a:t>
                       </a:r>
                     </a:p>
                   </a:txBody>
@@ -8810,7 +8810,7 @@
                           </a:solidFill>
                           <a:latin typeface="Arial"/>
                         </a:rPr>
-                        <a:t>F1</a:t>
+                        <a:t>+2</a:t>
                       </a:r>
                     </a:p>
                   </a:txBody>
@@ -8833,7 +8833,7 @@
                           </a:solidFill>
                           <a:latin typeface="Arial"/>
                         </a:rPr>
-                        <a:t>FPR</a:t>
+                        <a:t>+4</a:t>
                       </a:r>
                     </a:p>
                   </a:txBody>
@@ -8856,7 +8856,7 @@
                           </a:solidFill>
                           <a:latin typeface="Arial"/>
                         </a:rPr>
-                        <a:t>Recall</a:t>
+                        <a:t>+10</a:t>
                       </a:r>
                     </a:p>
                   </a:txBody>
@@ -8904,7 +8904,7 @@
                           </a:solidFill>
                           <a:latin typeface="Arial"/>
                         </a:rPr>
-                        <a:t>0.984</a:t>
+                        <a:t>0.583</a:t>
                       </a:r>
                     </a:p>
                   </a:txBody>
@@ -8927,7 +8927,7 @@
                           </a:solidFill>
                           <a:latin typeface="Arial"/>
                         </a:rPr>
-                        <a:t>0.000</a:t>
+                        <a:t>0.642</a:t>
                       </a:r>
                     </a:p>
                   </a:txBody>
@@ -8950,7 +8950,7 @@
                           </a:solidFill>
                           <a:latin typeface="Arial"/>
                         </a:rPr>
-                        <a:t>1.000</a:t>
+                        <a:t>0.524</a:t>
                       </a:r>
                     </a:p>
                   </a:txBody>
@@ -8975,7 +8975,7 @@
                           </a:solidFill>
                           <a:latin typeface="Arial"/>
                         </a:rPr>
-                        <a:t>Logistic regression, 8-window</a:t>
+                        <a:t>“assume nothing changes” baseline</a:t>
                       </a:r>
                     </a:p>
                   </a:txBody>
@@ -8998,7 +8998,7 @@
                           </a:solidFill>
                           <a:latin typeface="Arial"/>
                         </a:rPr>
-                        <a:t>0.744</a:t>
+                        <a:t>0.473</a:t>
                       </a:r>
                     </a:p>
                   </a:txBody>
@@ -9021,7 +9021,7 @@
                           </a:solidFill>
                           <a:latin typeface="Arial"/>
                         </a:rPr>
-                        <a:t>0.004</a:t>
+                        <a:t>0.474</a:t>
                       </a:r>
                     </a:p>
                   </a:txBody>
@@ -9044,7 +9044,7 @@
                           </a:solidFill>
                           <a:latin typeface="Arial"/>
                         </a:rPr>
-                        <a:t>0.912</a:t>
+                        <a:t>0.436</a:t>
                       </a:r>
                     </a:p>
                   </a:txBody>
@@ -9069,7 +9069,7 @@
                           </a:solidFill>
                           <a:latin typeface="Arial"/>
                         </a:rPr>
-                        <a:t>Logistic regression, 1 window</a:t>
+                        <a:t>Detection F1: 0.979 vs 0.977 — a tie</a:t>
                       </a:r>
                     </a:p>
                   </a:txBody>
@@ -9092,7 +9092,7 @@
                           </a:solidFill>
                           <a:latin typeface="Arial"/>
                         </a:rPr>
-                        <a:t>0.550</a:t>
+                        <a:t/>
                       </a:r>
                     </a:p>
                   </a:txBody>
@@ -9115,7 +9115,7 @@
                           </a:solidFill>
                           <a:latin typeface="Arial"/>
                         </a:rPr>
-                        <a:t>0.009</a:t>
+                        <a:t/>
                       </a:r>
                     </a:p>
                   </a:txBody>
@@ -9138,7 +9138,7 @@
                           </a:solidFill>
                           <a:latin typeface="Arial"/>
                         </a:rPr>
-                        <a:t>0.842</a:t>
+                        <a:t/>
                       </a:r>
                     </a:p>
                   </a:txBody>
@@ -9324,7 +9324,23 @@
                 </a:solidFill>
                 <a:latin typeface="Arial"/>
               </a:rPr>
-              <a:t>• MITRE stage macro-F1 0.455 vs 0.353; beats a persistence baseline at 9 of 10 forecast horizons</a:t>
+              <a:t>• MITRE stage macro-F1 0.537 vs 0.453 for the baseline</a:t>
+            </a:r>
+          </a:p>
+          <a:p>
+            <a:pPr algn="l">
+              <a:spcAft>
+                <a:spcPts val="400"/>
+              </a:spcAft>
+            </a:pPr>
+            <a:r>
+              <a:rPr sz="1000" b="0">
+                <a:solidFill>
+                  <a:srgbClr val="333F50"/>
+                </a:solidFill>
+                <a:latin typeface="Arial"/>
+              </a:rPr>
+              <a:t>• Transfers to unseen malware families — trained on Neris and Rbot, F1 0.874 and ROC-AUC 0.982 on Virut and Murlo</a:t>
             </a:r>
           </a:p>
           <a:p>
@@ -9484,7 +9500,7 @@
                 </a:solidFill>
                 <a:latin typeface="Arial"/>
               </a:rPr>
-              <a:t>Dataset has no pre-infection baseline</a:t>
+              <a:t>Detection is no better than logistic regression</a:t>
             </a:r>
           </a:p>
           <a:p>
@@ -9500,7 +9516,7 @@
                 </a:solidFill>
                 <a:latin typeface="Arial"/>
               </a:rPr>
-              <a:t>    CTU-13 hosts are malicious in every window → we forecast kill-chain progression instead, and say so plainly</a:t>
+              <a:t>    0.979 vs 0.977. An earlier 0.984-vs-0.744 gap was an artefact of a test split whose positives came from one host → the model earns its place on forecasting, not detection</a:t>
             </a:r>
           </a:p>
           <a:p>
@@ -9516,7 +9532,7 @@
                 </a:solidFill>
                 <a:latin typeface="Arial"/>
               </a:rPr>
-              <a:t>Generalising to unseen malware families</a:t>
+              <a:t>Short-burst compromise</a:t>
             </a:r>
           </a:p>
           <a:p>
@@ -9532,7 +9548,7 @@
                 </a:solidFill>
                 <a:latin typeface="Arial"/>
               </a:rPr>
-              <a:t>    Only ~4 infected hosts to learn from → reported as a measured limitation, not hidden; needs more captures</a:t>
+              <a:t>    The risk head needs sustained activity → the unsupervised surprise channel covers that gap; triage flags on either, catching 28 of 30 hosts at 4.9% false alarms</a:t>
             </a:r>
           </a:p>
           <a:p>
@@ -9548,7 +9564,7 @@
                 </a:solidFill>
                 <a:latin typeface="Arial"/>
               </a:rPr>
-              <a:t>Supervised head misses short bursts</a:t>
+              <a:t>Stage forecasting does not cross families</a:t>
             </a:r>
           </a:p>
           <a:p>
@@ -9564,39 +9580,7 @@
                 </a:solidFill>
                 <a:latin typeface="Arial"/>
               </a:rPr>
-              <a:t>    Same IP scores 1.000 with 284 malicious windows and 0.000 with 20 → a dependence on sustained activity. The unsupervised surprise channel covers exactly that gap (ROC-AUC 1.000 on scenario 10's ten short-burst hosts), so triage flags on either → 14/16 hosts caught, 4.1% false alarms</a:t>
-            </a:r>
-          </a:p>
-          <a:p>
-            <a:pPr algn="l">
-              <a:spcAft>
-                <a:spcPts val="400"/>
-              </a:spcAft>
-            </a:pPr>
-            <a:r>
-              <a:rPr sz="1050" b="1">
-                <a:solidFill>
-                  <a:srgbClr val="1F497D"/>
-                </a:solidFill>
-                <a:latin typeface="Arial"/>
-              </a:rPr>
-              <a:t>Class imbalance (0.8% positive)</a:t>
-            </a:r>
-          </a:p>
-          <a:p>
-            <a:pPr algn="l">
-              <a:spcAft>
-                <a:spcPts val="400"/>
-              </a:spcAft>
-            </a:pPr>
-            <a:r>
-              <a:rPr sz="850">
-                <a:solidFill>
-                  <a:srgbClr val="5A6478"/>
-                </a:solidFill>
-                <a:latin typeface="Arial"/>
-              </a:rPr>
-              <a:t>    Transition-aware weighted sampling + noise augmentation + a deliberately small model</a:t>
+              <a:t>    Detection transfers to unseen malware, progression does not — reported, not hidden</a:t>
             </a:r>
           </a:p>
         </p:txBody>

--- a/SIH2026_PS26153_Presentation.pptx
+++ b/SIH2026_PS26153_Presentation.pptx
@@ -5784,31 +5784,6 @@
                 </a:solidFill>
                 <a:latin typeface="Arial"/>
               </a:rPr>
-              <a:t>Team ID – </a:t>
-            </a:r>
-            <a:r>
-              <a:rPr sz="1300">
-                <a:solidFill>
-                  <a:srgbClr val="333F50"/>
-                </a:solidFill>
-                <a:latin typeface="Arial"/>
-              </a:rPr>
-              <a:t>[Team ID]</a:t>
-            </a:r>
-          </a:p>
-          <a:p>
-            <a:pPr>
-              <a:spcAft>
-                <a:spcPts val="700"/>
-              </a:spcAft>
-            </a:pPr>
-            <a:r>
-              <a:rPr sz="1300" b="1">
-                <a:solidFill>
-                  <a:srgbClr val="1F497D"/>
-                </a:solidFill>
-                <a:latin typeface="Arial"/>
-              </a:rPr>
               <a:t>Team Name – </a:t>
             </a:r>
             <a:r>

--- a/SIH2026_PS26153_Presentation.pptx
+++ b/SIH2026_PS26153_Presentation.pptx
@@ -5784,6 +5784,31 @@
                 </a:solidFill>
                 <a:latin typeface="Arial"/>
               </a:rPr>
+              <a:t>Team ID – </a:t>
+            </a:r>
+            <a:r>
+              <a:rPr sz="1300">
+                <a:solidFill>
+                  <a:srgbClr val="333F50"/>
+                </a:solidFill>
+                <a:latin typeface="Arial"/>
+              </a:rPr>
+              <a:t>261</a:t>
+            </a:r>
+          </a:p>
+          <a:p>
+            <a:pPr>
+              <a:spcAft>
+                <a:spcPts val="700"/>
+              </a:spcAft>
+            </a:pPr>
+            <a:r>
+              <a:rPr sz="1300" b="1">
+                <a:solidFill>
+                  <a:srgbClr val="1F497D"/>
+                </a:solidFill>
+                <a:latin typeface="Arial"/>
+              </a:rPr>
               <a:t>Team Name – </a:t>
             </a:r>
             <a:r>

--- a/SIH2026_PS26153_Presentation.pptx
+++ b/SIH2026_PS26153_Presentation.pptx
@@ -9396,7 +9396,7 @@
         <p:spPr>
           <a:xfrm>
             <a:off x="7360920" y="1755648"/>
-            <a:ext cx="1931212" cy="365760"/>
+            <a:ext cx="1931212" cy="352044"/>
           </a:xfrm>
           <a:prstGeom prst="roundRect">
             <a:avLst/>
@@ -9449,7 +9449,7 @@
         <p:spPr>
           <a:xfrm>
             <a:off x="9356140" y="1755648"/>
-            <a:ext cx="2393899" cy="365760"/>
+            <a:ext cx="2393899" cy="352044"/>
           </a:xfrm>
           <a:prstGeom prst="roundRect">
             <a:avLst/>
@@ -9501,8 +9501,8 @@
         </p:nvSpPr>
         <p:spPr>
           <a:xfrm>
-            <a:off x="7360920" y="2171700"/>
-            <a:ext cx="1931212" cy="365760"/>
+            <a:off x="7360920" y="2157984"/>
+            <a:ext cx="1931212" cy="352044"/>
           </a:xfrm>
           <a:prstGeom prst="roundRect">
             <a:avLst/>
@@ -9554,8 +9554,8 @@
         </p:nvSpPr>
         <p:spPr>
           <a:xfrm>
-            <a:off x="9356140" y="2171700"/>
-            <a:ext cx="2393899" cy="365760"/>
+            <a:off x="9356140" y="2157984"/>
+            <a:ext cx="2393899" cy="352044"/>
           </a:xfrm>
           <a:prstGeom prst="roundRect">
             <a:avLst/>
@@ -9607,8 +9607,8 @@
         </p:nvSpPr>
         <p:spPr>
           <a:xfrm>
-            <a:off x="7360920" y="2587752"/>
-            <a:ext cx="1931212" cy="365760"/>
+            <a:off x="7360920" y="2560320"/>
+            <a:ext cx="1931212" cy="352044"/>
           </a:xfrm>
           <a:prstGeom prst="roundRect">
             <a:avLst/>
@@ -9660,8 +9660,8 @@
         </p:nvSpPr>
         <p:spPr>
           <a:xfrm>
-            <a:off x="9356140" y="2587752"/>
-            <a:ext cx="2393899" cy="365760"/>
+            <a:off x="9356140" y="2560320"/>
+            <a:ext cx="2393899" cy="352044"/>
           </a:xfrm>
           <a:prstGeom prst="roundRect">
             <a:avLst/>
@@ -9713,8 +9713,8 @@
         </p:nvSpPr>
         <p:spPr>
           <a:xfrm>
-            <a:off x="7360920" y="3003804"/>
-            <a:ext cx="1931212" cy="365760"/>
+            <a:off x="7360920" y="2962656"/>
+            <a:ext cx="1931212" cy="352044"/>
           </a:xfrm>
           <a:prstGeom prst="roundRect">
             <a:avLst/>
@@ -9766,8 +9766,8 @@
         </p:nvSpPr>
         <p:spPr>
           <a:xfrm>
-            <a:off x="9356140" y="3003804"/>
-            <a:ext cx="2393899" cy="365760"/>
+            <a:off x="9356140" y="2962656"/>
+            <a:ext cx="2393899" cy="352044"/>
           </a:xfrm>
           <a:prstGeom prst="roundRect">
             <a:avLst/>
@@ -9819,8 +9819,8 @@
         </p:nvSpPr>
         <p:spPr>
           <a:xfrm>
-            <a:off x="7360920" y="3419856"/>
-            <a:ext cx="1931212" cy="365760"/>
+            <a:off x="7360920" y="3364991"/>
+            <a:ext cx="1931212" cy="352044"/>
           </a:xfrm>
           <a:prstGeom prst="roundRect">
             <a:avLst/>
@@ -9872,8 +9872,8 @@
         </p:nvSpPr>
         <p:spPr>
           <a:xfrm>
-            <a:off x="9356140" y="3419856"/>
-            <a:ext cx="2393899" cy="365760"/>
+            <a:off x="9356140" y="3364991"/>
+            <a:ext cx="2393899" cy="352044"/>
           </a:xfrm>
           <a:prstGeom prst="roundRect">
             <a:avLst/>
@@ -9925,8 +9925,8 @@
         </p:nvSpPr>
         <p:spPr>
           <a:xfrm>
-            <a:off x="7360920" y="3835908"/>
-            <a:ext cx="1931212" cy="365760"/>
+            <a:off x="7360920" y="3767328"/>
+            <a:ext cx="1931212" cy="352044"/>
           </a:xfrm>
           <a:prstGeom prst="roundRect">
             <a:avLst/>
@@ -9978,8 +9978,8 @@
         </p:nvSpPr>
         <p:spPr>
           <a:xfrm>
-            <a:off x="9356140" y="3835908"/>
-            <a:ext cx="2393899" cy="365760"/>
+            <a:off x="9356140" y="3767328"/>
+            <a:ext cx="2393899" cy="352044"/>
           </a:xfrm>
           <a:prstGeom prst="roundRect">
             <a:avLst/>
@@ -10031,8 +10031,8 @@
         </p:nvSpPr>
         <p:spPr>
           <a:xfrm>
-            <a:off x="7360920" y="4251960"/>
-            <a:ext cx="1931212" cy="365760"/>
+            <a:off x="7360920" y="4169664"/>
+            <a:ext cx="1931212" cy="352044"/>
           </a:xfrm>
           <a:prstGeom prst="roundRect">
             <a:avLst/>
@@ -10084,8 +10084,8 @@
         </p:nvSpPr>
         <p:spPr>
           <a:xfrm>
-            <a:off x="9356140" y="4251960"/>
-            <a:ext cx="2393899" cy="365760"/>
+            <a:off x="9356140" y="4169664"/>
+            <a:ext cx="2393899" cy="352044"/>
           </a:xfrm>
           <a:prstGeom prst="roundRect">
             <a:avLst/>
@@ -10137,8 +10137,8 @@
         </p:nvSpPr>
         <p:spPr>
           <a:xfrm>
-            <a:off x="7360920" y="4668012"/>
-            <a:ext cx="1931212" cy="365760"/>
+            <a:off x="7360920" y="4572000"/>
+            <a:ext cx="1931212" cy="352044"/>
           </a:xfrm>
           <a:prstGeom prst="roundRect">
             <a:avLst/>
@@ -10190,8 +10190,8 @@
         </p:nvSpPr>
         <p:spPr>
           <a:xfrm>
-            <a:off x="9356140" y="4668012"/>
-            <a:ext cx="2393899" cy="365760"/>
+            <a:off x="9356140" y="4572000"/>
+            <a:ext cx="2393899" cy="352044"/>
           </a:xfrm>
           <a:prstGeom prst="roundRect">
             <a:avLst/>
@@ -10243,8 +10243,8 @@
         </p:nvSpPr>
         <p:spPr>
           <a:xfrm>
-            <a:off x="7360920" y="5084064"/>
-            <a:ext cx="1931212" cy="365760"/>
+            <a:off x="7360920" y="4974336"/>
+            <a:ext cx="1931212" cy="352044"/>
           </a:xfrm>
           <a:prstGeom prst="roundRect">
             <a:avLst/>
@@ -10296,8 +10296,8 @@
         </p:nvSpPr>
         <p:spPr>
           <a:xfrm>
-            <a:off x="9356140" y="5084064"/>
-            <a:ext cx="2393899" cy="365760"/>
+            <a:off x="9356140" y="4974336"/>
+            <a:ext cx="2393899" cy="352044"/>
           </a:xfrm>
           <a:prstGeom prst="roundRect">
             <a:avLst/>
@@ -10349,8 +10349,8 @@
         </p:nvSpPr>
         <p:spPr>
           <a:xfrm>
-            <a:off x="7360920" y="5500116"/>
-            <a:ext cx="1931212" cy="365760"/>
+            <a:off x="7360920" y="5376672"/>
+            <a:ext cx="1931212" cy="352044"/>
           </a:xfrm>
           <a:prstGeom prst="roundRect">
             <a:avLst/>
@@ -10402,8 +10402,8 @@
         </p:nvSpPr>
         <p:spPr>
           <a:xfrm>
-            <a:off x="9356140" y="5500116"/>
-            <a:ext cx="2393899" cy="365760"/>
+            <a:off x="9356140" y="5376672"/>
+            <a:ext cx="2393899" cy="352044"/>
           </a:xfrm>
           <a:prstGeom prst="roundRect">
             <a:avLst/>
@@ -14260,7 +14260,7 @@
         </p:nvSpPr>
         <p:spPr>
           <a:xfrm>
-            <a:off x="8165592" y="3200400"/>
+            <a:off x="8165592" y="3127248"/>
             <a:ext cx="1682496" cy="1682496"/>
           </a:xfrm>
           <a:prstGeom prst="donut">
@@ -14302,7 +14302,7 @@
         </p:nvSpPr>
         <p:spPr>
           <a:xfrm>
-            <a:off x="8869680" y="3181014"/>
+            <a:off x="8869680" y="3107862"/>
             <a:ext cx="274320" cy="274320"/>
           </a:xfrm>
           <a:prstGeom prst="ellipse">
@@ -14355,7 +14355,7 @@
         </p:nvSpPr>
         <p:spPr>
           <a:xfrm>
-            <a:off x="8147304" y="2212848"/>
+            <a:off x="8147304" y="2231136"/>
             <a:ext cx="1719072" cy="566928"/>
           </a:xfrm>
           <a:prstGeom prst="rect">
@@ -14406,7 +14406,7 @@
         </p:nvSpPr>
         <p:spPr>
           <a:xfrm>
-            <a:off x="9496226" y="3542751"/>
+            <a:off x="9496226" y="3469599"/>
             <a:ext cx="274320" cy="274320"/>
           </a:xfrm>
           <a:prstGeom prst="ellipse">
@@ -14459,7 +14459,7 @@
         </p:nvSpPr>
         <p:spPr>
           <a:xfrm>
-            <a:off x="9936983" y="2990088"/>
+            <a:off x="9936983" y="2962656"/>
             <a:ext cx="1719072" cy="566928"/>
           </a:xfrm>
           <a:prstGeom prst="rect">
@@ -14510,7 +14510,7 @@
         </p:nvSpPr>
         <p:spPr>
           <a:xfrm>
-            <a:off x="9496226" y="4266224"/>
+            <a:off x="9496226" y="4193072"/>
             <a:ext cx="274320" cy="274320"/>
           </a:xfrm>
           <a:prstGeom prst="ellipse">
@@ -14563,7 +14563,7 @@
         </p:nvSpPr>
         <p:spPr>
           <a:xfrm>
-            <a:off x="9936983" y="4544568"/>
+            <a:off x="9936983" y="4425696"/>
             <a:ext cx="1719072" cy="566928"/>
           </a:xfrm>
           <a:prstGeom prst="rect">
@@ -14614,7 +14614,7 @@
         </p:nvSpPr>
         <p:spPr>
           <a:xfrm>
-            <a:off x="8869680" y="4627961"/>
+            <a:off x="8869680" y="4554809"/>
             <a:ext cx="274320" cy="274320"/>
           </a:xfrm>
           <a:prstGeom prst="ellipse">
@@ -14667,7 +14667,7 @@
         </p:nvSpPr>
         <p:spPr>
           <a:xfrm>
-            <a:off x="8147304" y="5321808"/>
+            <a:off x="8147304" y="5157216"/>
             <a:ext cx="1719072" cy="566928"/>
           </a:xfrm>
           <a:prstGeom prst="rect">
@@ -14718,7 +14718,7 @@
         </p:nvSpPr>
         <p:spPr>
           <a:xfrm>
-            <a:off x="8243133" y="4266224"/>
+            <a:off x="8243133" y="4193072"/>
             <a:ext cx="274320" cy="274320"/>
           </a:xfrm>
           <a:prstGeom prst="ellipse">
@@ -14771,7 +14771,7 @@
         </p:nvSpPr>
         <p:spPr>
           <a:xfrm>
-            <a:off x="6357624" y="4544568"/>
+            <a:off x="6357624" y="4425696"/>
             <a:ext cx="1719072" cy="566928"/>
           </a:xfrm>
           <a:prstGeom prst="rect">
@@ -14822,7 +14822,7 @@
         </p:nvSpPr>
         <p:spPr>
           <a:xfrm>
-            <a:off x="8243133" y="3542751"/>
+            <a:off x="8243133" y="3469599"/>
             <a:ext cx="274320" cy="274320"/>
           </a:xfrm>
           <a:prstGeom prst="ellipse">
@@ -14875,7 +14875,7 @@
         </p:nvSpPr>
         <p:spPr>
           <a:xfrm>
-            <a:off x="6357624" y="2990087"/>
+            <a:off x="6357624" y="2962656"/>
             <a:ext cx="1719072" cy="566928"/>
           </a:xfrm>
           <a:prstGeom prst="rect">
@@ -16636,7 +16636,7 @@
         </p:nvSpPr>
         <p:spPr>
           <a:xfrm>
-            <a:off x="411480" y="4443983"/>
+            <a:off x="411480" y="4261104"/>
             <a:ext cx="11338560" cy="256032"/>
           </a:xfrm>
           <a:prstGeom prst="rect">
@@ -16658,7 +16658,7 @@
                 </a:solidFill>
                 <a:latin typeface="Arial"/>
               </a:rPr>
-              <a:t>Built with</a:t>
+              <a:t>Team - Git with It</a:t>
             </a:r>
           </a:p>
         </p:txBody>
@@ -16671,7 +16671,7 @@
         </p:nvSpPr>
         <p:spPr>
           <a:xfrm>
-            <a:off x="448056" y="4700016"/>
+            <a:off x="448056" y="4517136"/>
             <a:ext cx="11265408" cy="32004"/>
           </a:xfrm>
           <a:prstGeom prst="rect">
@@ -16713,8 +16713,8 @@
         </p:nvSpPr>
         <p:spPr>
           <a:xfrm>
-            <a:off x="411480" y="4882896"/>
-            <a:ext cx="1541417" cy="621792"/>
+            <a:off x="411480" y="4681728"/>
+            <a:ext cx="1813560" cy="621792"/>
           </a:xfrm>
           <a:prstGeom prst="foldedCorner">
             <a:avLst/>
@@ -16747,13 +16747,25 @@
           <a:p>
             <a:pPr algn="ctr"/>
             <a:r>
-              <a:rPr sz="800" b="1">
+              <a:rPr sz="900" b="1">
                 <a:solidFill>
                   <a:srgbClr val="FFFFFF"/>
                 </a:solidFill>
                 <a:latin typeface="Arial"/>
               </a:rPr>
-              <a:t>Python 3.13</a:t>
+              <a:t>Suyash Shukla</a:t>
+            </a:r>
+          </a:p>
+          <a:p>
+            <a:pPr algn="ctr"/>
+            <a:r>
+              <a:rPr sz="700" b="0">
+                <a:solidFill>
+                  <a:srgbClr val="FFFFFF"/>
+                </a:solidFill>
+                <a:latin typeface="Arial"/>
+              </a:rPr>
+              <a:t>Team Leader</a:t>
             </a:r>
           </a:p>
         </p:txBody>
@@ -16766,8 +16778,8 @@
         </p:nvSpPr>
         <p:spPr>
           <a:xfrm>
-            <a:off x="2044337" y="4882896"/>
-            <a:ext cx="1541417" cy="621792"/>
+            <a:off x="2316480" y="4681728"/>
+            <a:ext cx="1813560" cy="621792"/>
           </a:xfrm>
           <a:prstGeom prst="foldedCorner">
             <a:avLst/>
@@ -16800,13 +16812,25 @@
           <a:p>
             <a:pPr algn="ctr"/>
             <a:r>
-              <a:rPr sz="800" b="1">
+              <a:rPr sz="900" b="1">
                 <a:solidFill>
                   <a:srgbClr val="FFFFFF"/>
                 </a:solidFill>
                 <a:latin typeface="Arial"/>
               </a:rPr>
-              <a:t>PyTorch</a:t>
+              <a:t>Tanmay Kumar Sinha</a:t>
+            </a:r>
+          </a:p>
+          <a:p>
+            <a:pPr algn="ctr"/>
+            <a:r>
+              <a:rPr sz="700" b="0">
+                <a:solidFill>
+                  <a:srgbClr val="FFFFFF"/>
+                </a:solidFill>
+                <a:latin typeface="Arial"/>
+              </a:rPr>
+              <a:t>Member</a:t>
             </a:r>
           </a:p>
         </p:txBody>
@@ -16819,8 +16843,8 @@
         </p:nvSpPr>
         <p:spPr>
           <a:xfrm>
-            <a:off x="3677194" y="4882896"/>
-            <a:ext cx="1541417" cy="621792"/>
+            <a:off x="4221480" y="4681728"/>
+            <a:ext cx="1813560" cy="621792"/>
           </a:xfrm>
           <a:prstGeom prst="foldedCorner">
             <a:avLst/>
@@ -16853,13 +16877,25 @@
           <a:p>
             <a:pPr algn="ctr"/>
             <a:r>
-              <a:rPr sz="800" b="1">
+              <a:rPr sz="900" b="1">
                 <a:solidFill>
                   <a:srgbClr val="FFFFFF"/>
                 </a:solidFill>
                 <a:latin typeface="Arial"/>
               </a:rPr>
-              <a:t>Scapy</a:t>
+              <a:t>Shivam Kumar Tripathi</a:t>
+            </a:r>
+          </a:p>
+          <a:p>
+            <a:pPr algn="ctr"/>
+            <a:r>
+              <a:rPr sz="700" b="0">
+                <a:solidFill>
+                  <a:srgbClr val="FFFFFF"/>
+                </a:solidFill>
+                <a:latin typeface="Arial"/>
+              </a:rPr>
+              <a:t>Member</a:t>
             </a:r>
           </a:p>
         </p:txBody>
@@ -16872,8 +16908,8 @@
         </p:nvSpPr>
         <p:spPr>
           <a:xfrm>
-            <a:off x="5310051" y="4882896"/>
-            <a:ext cx="1541417" cy="621792"/>
+            <a:off x="6126480" y="4681728"/>
+            <a:ext cx="1813560" cy="621792"/>
           </a:xfrm>
           <a:prstGeom prst="foldedCorner">
             <a:avLst/>
@@ -16906,13 +16942,25 @@
           <a:p>
             <a:pPr algn="ctr"/>
             <a:r>
-              <a:rPr sz="800" b="1">
+              <a:rPr sz="900" b="1">
                 <a:solidFill>
                   <a:srgbClr val="FFFFFF"/>
                 </a:solidFill>
                 <a:latin typeface="Arial"/>
               </a:rPr>
-              <a:t>pandas + NumPy</a:t>
+              <a:t>Tanay</a:t>
+            </a:r>
+          </a:p>
+          <a:p>
+            <a:pPr algn="ctr"/>
+            <a:r>
+              <a:rPr sz="700" b="0">
+                <a:solidFill>
+                  <a:srgbClr val="FFFFFF"/>
+                </a:solidFill>
+                <a:latin typeface="Arial"/>
+              </a:rPr>
+              <a:t>Member</a:t>
             </a:r>
           </a:p>
         </p:txBody>
@@ -16925,8 +16973,8 @@
         </p:nvSpPr>
         <p:spPr>
           <a:xfrm>
-            <a:off x="6942908" y="4882896"/>
-            <a:ext cx="1541417" cy="621792"/>
+            <a:off x="8031480" y="4681728"/>
+            <a:ext cx="1813560" cy="621792"/>
           </a:xfrm>
           <a:prstGeom prst="foldedCorner">
             <a:avLst/>
@@ -16959,13 +17007,25 @@
           <a:p>
             <a:pPr algn="ctr"/>
             <a:r>
-              <a:rPr sz="800" b="1">
+              <a:rPr sz="900" b="1">
                 <a:solidFill>
                   <a:srgbClr val="FFFFFF"/>
                 </a:solidFill>
                 <a:latin typeface="Arial"/>
               </a:rPr>
-              <a:t>scikit-learn</a:t>
+              <a:t>Yuvan Laxmanan</a:t>
+            </a:r>
+          </a:p>
+          <a:p>
+            <a:pPr algn="ctr"/>
+            <a:r>
+              <a:rPr sz="700" b="0">
+                <a:solidFill>
+                  <a:srgbClr val="FFFFFF"/>
+                </a:solidFill>
+                <a:latin typeface="Arial"/>
+              </a:rPr>
+              <a:t>Member</a:t>
             </a:r>
           </a:p>
         </p:txBody>
@@ -16978,8 +17038,8 @@
         </p:nvSpPr>
         <p:spPr>
           <a:xfrm>
-            <a:off x="8575765" y="4882896"/>
-            <a:ext cx="1541417" cy="621792"/>
+            <a:off x="9936480" y="4681728"/>
+            <a:ext cx="1813560" cy="621792"/>
           </a:xfrm>
           <a:prstGeom prst="foldedCorner">
             <a:avLst/>
@@ -17012,73 +17072,32 @@
           <a:p>
             <a:pPr algn="ctr"/>
             <a:r>
-              <a:rPr sz="800" b="1">
+              <a:rPr sz="900" b="1">
                 <a:solidFill>
                   <a:srgbClr val="FFFFFF"/>
                 </a:solidFill>
                 <a:latin typeface="Arial"/>
               </a:rPr>
-              <a:t>FastAPI</a:t>
-            </a:r>
-          </a:p>
-        </p:txBody>
-      </p:sp>
-      <p:sp>
-        <p:nvSpPr>
-          <p:cNvPr id="17441" name="Folded Corner 17440"/>
-          <p:cNvSpPr/>
-          <p:nvPr/>
-        </p:nvSpPr>
-        <p:spPr>
-          <a:xfrm>
-            <a:off x="10208622" y="4882896"/>
-            <a:ext cx="1541417" cy="621792"/>
-          </a:xfrm>
-          <a:prstGeom prst="foldedCorner">
-            <a:avLst/>
-          </a:prstGeom>
-          <a:solidFill>
-            <a:srgbClr val="4F81BD"/>
-          </a:solidFill>
-          <a:ln>
-            <a:noFill/>
-          </a:ln>
-          <a:effectLst/>
-        </p:spPr>
-        <p:style>
-          <a:lnRef idx="1">
-            <a:schemeClr val="accent1"/>
-          </a:lnRef>
-          <a:fillRef idx="3">
-            <a:schemeClr val="accent1"/>
-          </a:fillRef>
-          <a:effectRef idx="2">
-            <a:schemeClr val="accent1"/>
-          </a:effectRef>
-          <a:fontRef idx="minor">
-            <a:schemeClr val="lt1"/>
-          </a:fontRef>
-        </p:style>
-        <p:txBody>
-          <a:bodyPr rtlCol="0" anchor="ctr" wrap="square" lIns="50800" rIns="50800" tIns="25400" bIns="25400"/>
-          <a:lstStyle/>
+              <a:t>Vaishnavi Tripathi</a:t>
+            </a:r>
+          </a:p>
           <a:p>
             <a:pPr algn="ctr"/>
             <a:r>
-              <a:rPr sz="800" b="1">
+              <a:rPr sz="700" b="0">
                 <a:solidFill>
                   <a:srgbClr val="FFFFFF"/>
                 </a:solidFill>
                 <a:latin typeface="Arial"/>
               </a:rPr>
-              <a:t>Integrated Gradients</a:t>
-            </a:r>
-          </a:p>
-        </p:txBody>
-      </p:sp>
-      <p:sp>
-        <p:nvSpPr>
-          <p:cNvPr id="17442" name="Rounded Rectangle 17441"/>
+              <a:t>Member</a:t>
+            </a:r>
+          </a:p>
+        </p:txBody>
+      </p:sp>
+      <p:sp>
+        <p:nvSpPr>
+          <p:cNvPr id="17441" name="Rounded Rectangle 17440"/>
           <p:cNvSpPr/>
           <p:nvPr/>
         </p:nvSpPr>
@@ -17131,7 +17150,7 @@
       </p:sp>
       <p:sp>
         <p:nvSpPr>
-          <p:cNvPr id="17443" name="Rounded Rectangle 17442"/>
+          <p:cNvPr id="17442" name="Rounded Rectangle 17441"/>
           <p:cNvSpPr/>
           <p:nvPr/>
         </p:nvSpPr>

--- a/SIH2026_PS26153_Presentation.pptx
+++ b/SIH2026_PS26153_Presentation.pptx
@@ -6104,6 +6104,15 @@
           <a:prstGeom prst="ellipse">
             <a:avLst/>
           </a:prstGeom>
+          <a:solidFill>
+            <a:srgbClr val="F2F5FA"/>
+          </a:solidFill>
+          <a:ln w="19050">
+            <a:solidFill>
+              <a:srgbClr val="1F497D"/>
+            </a:solidFill>
+          </a:ln>
+          <a:effectLst/>
         </p:spPr>
         <p:style>
           <a:lnRef idx="2">
@@ -6125,7 +6134,12 @@
           <a:p>
             <a:pPr algn="ctr"/>
             <a:r>
-              <a:rPr lang="en-US" dirty="0" sz="900"/>
+              <a:rPr lang="en-US" dirty="0" sz="1100" b="1">
+                <a:solidFill>
+                  <a:srgbClr val="1F497D"/>
+                </a:solidFill>
+                <a:latin typeface="Arial"/>
+              </a:rPr>
               <a:t>Git with It</a:t>
             </a:r>
             <a:endParaRPr lang="en-IN" dirty="0"/>
@@ -8468,6 +8482,15 @@
           <a:prstGeom prst="ellipse">
             <a:avLst/>
           </a:prstGeom>
+          <a:solidFill>
+            <a:srgbClr val="F2F5FA"/>
+          </a:solidFill>
+          <a:ln w="19050">
+            <a:solidFill>
+              <a:srgbClr val="1F497D"/>
+            </a:solidFill>
+          </a:ln>
+          <a:effectLst/>
         </p:spPr>
         <p:style>
           <a:lnRef idx="2">
@@ -8489,7 +8512,12 @@
           <a:p>
             <a:pPr algn="ctr"/>
             <a:r>
-              <a:rPr lang="en-US" dirty="0" sz="900"/>
+              <a:rPr lang="en-US" dirty="0" sz="1100" b="1">
+                <a:solidFill>
+                  <a:srgbClr val="1F497D"/>
+                </a:solidFill>
+                <a:latin typeface="Arial"/>
+              </a:rPr>
               <a:t>Git with It</a:t>
             </a:r>
             <a:endParaRPr lang="en-IN" dirty="0"/>
@@ -10872,6 +10900,15 @@
           <a:prstGeom prst="ellipse">
             <a:avLst/>
           </a:prstGeom>
+          <a:solidFill>
+            <a:srgbClr val="F2F5FA"/>
+          </a:solidFill>
+          <a:ln w="19050">
+            <a:solidFill>
+              <a:srgbClr val="1F497D"/>
+            </a:solidFill>
+          </a:ln>
+          <a:effectLst/>
         </p:spPr>
         <p:style>
           <a:lnRef idx="2">
@@ -10893,7 +10930,12 @@
           <a:p>
             <a:pPr algn="ctr"/>
             <a:r>
-              <a:rPr lang="en-US" dirty="0" sz="900"/>
+              <a:rPr lang="en-US" dirty="0" sz="1100" b="1">
+                <a:solidFill>
+                  <a:srgbClr val="1F497D"/>
+                </a:solidFill>
+                <a:latin typeface="Arial"/>
+              </a:rPr>
               <a:t>Git with It</a:t>
             </a:r>
             <a:endParaRPr lang="en-IN" dirty="0"/>
@@ -13422,6 +13464,15 @@
           <a:prstGeom prst="ellipse">
             <a:avLst/>
           </a:prstGeom>
+          <a:solidFill>
+            <a:srgbClr val="F2F5FA"/>
+          </a:solidFill>
+          <a:ln w="19050">
+            <a:solidFill>
+              <a:srgbClr val="1F497D"/>
+            </a:solidFill>
+          </a:ln>
+          <a:effectLst/>
         </p:spPr>
         <p:style>
           <a:lnRef idx="2">
@@ -13443,7 +13494,12 @@
           <a:p>
             <a:pPr algn="ctr"/>
             <a:r>
-              <a:rPr lang="en-US" dirty="0" sz="900"/>
+              <a:rPr lang="en-US" dirty="0" sz="1100" b="1">
+                <a:solidFill>
+                  <a:srgbClr val="1F497D"/>
+                </a:solidFill>
+                <a:latin typeface="Arial"/>
+              </a:rPr>
               <a:t>Git with It</a:t>
             </a:r>
             <a:endParaRPr lang="en-IN" dirty="0"/>
@@ -15348,6 +15404,15 @@
           <a:prstGeom prst="ellipse">
             <a:avLst/>
           </a:prstGeom>
+          <a:solidFill>
+            <a:srgbClr val="F2F5FA"/>
+          </a:solidFill>
+          <a:ln w="19050">
+            <a:solidFill>
+              <a:srgbClr val="1F497D"/>
+            </a:solidFill>
+          </a:ln>
+          <a:effectLst/>
         </p:spPr>
         <p:style>
           <a:lnRef idx="2">
@@ -15369,7 +15434,12 @@
           <a:p>
             <a:pPr algn="ctr"/>
             <a:r>
-              <a:rPr lang="en-US" dirty="0" sz="900"/>
+              <a:rPr lang="en-US" dirty="0" sz="1100" b="1">
+                <a:solidFill>
+                  <a:srgbClr val="1F497D"/>
+                </a:solidFill>
+                <a:latin typeface="Arial"/>
+              </a:rPr>
               <a:t>Git with It</a:t>
             </a:r>
             <a:endParaRPr lang="en-IN" dirty="0"/>

--- a/SIH2026_PS26153_Presentation.pptx
+++ b/SIH2026_PS26153_Presentation.pptx
@@ -7912,7 +7912,7 @@
         <p:spPr>
           <a:xfrm>
             <a:off x="6309360" y="4617720"/>
-            <a:ext cx="1959863" cy="457200"/>
+            <a:ext cx="1911095" cy="457200"/>
           </a:xfrm>
           <a:prstGeom prst="roundRect">
             <a:avLst/>
@@ -7940,9 +7940,20 @@
           </a:fontRef>
         </p:style>
         <p:txBody>
-          <a:bodyPr rtlCol="0" anchor="ctr"/>
-          <a:lstStyle/>
-          <a:p/>
+          <a:bodyPr rtlCol="0" anchor="ctr" wrap="square" lIns="50800" rIns="50800" tIns="25400" bIns="25400"/>
+          <a:lstStyle/>
+          <a:p>
+            <a:pPr algn="ctr"/>
+            <a:r>
+              <a:rPr sz="800" b="1">
+                <a:solidFill>
+                  <a:srgbClr val="E37B2A"/>
+                </a:solidFill>
+                <a:latin typeface="Arial"/>
+              </a:rPr>
+              <a:t>World model, not a classifier</a:t>
+            </a:r>
+          </a:p>
         </p:txBody>
       </p:sp>
       <p:sp>
@@ -7953,8 +7964,8 @@
         </p:nvSpPr>
         <p:spPr>
           <a:xfrm>
-            <a:off x="6492240" y="5120640"/>
-            <a:ext cx="1594103" cy="658368"/>
+            <a:off x="6437376" y="5129783"/>
+            <a:ext cx="1655063" cy="566928"/>
           </a:xfrm>
           <a:prstGeom prst="rect">
             <a:avLst/>
@@ -7969,25 +7980,9 @@
           <a:p>
             <a:pPr algn="ctr"/>
             <a:r>
-              <a:rPr sz="800" b="1">
-                <a:solidFill>
-                  <a:srgbClr val="E37B2A"/>
-                </a:solidFill>
-                <a:latin typeface="Arial"/>
-              </a:rPr>
-              <a:t>World model, not a classifier</a:t>
-            </a:r>
-          </a:p>
-          <a:p>
-            <a:pPr algn="ctr">
-              <a:spcBef>
-                <a:spcPts val="100"/>
-              </a:spcBef>
-            </a:pPr>
-            <a:r>
-              <a:rPr sz="700" b="0">
-                <a:solidFill>
-                  <a:srgbClr val="E37B2A"/>
+              <a:rPr sz="750" b="0">
+                <a:solidFill>
+                  <a:srgbClr val="5A6478"/>
                 </a:solidFill>
                 <a:latin typeface="Arial"/>
               </a:rPr>
@@ -8004,8 +7999,8 @@
         </p:nvSpPr>
         <p:spPr>
           <a:xfrm>
-            <a:off x="8049767" y="4617720"/>
-            <a:ext cx="1959863" cy="457200"/>
+            <a:off x="8074152" y="4617720"/>
+            <a:ext cx="1911095" cy="457200"/>
           </a:xfrm>
           <a:prstGeom prst="roundRect">
             <a:avLst/>
@@ -8033,9 +8028,20 @@
           </a:fontRef>
         </p:style>
         <p:txBody>
-          <a:bodyPr rtlCol="0" anchor="ctr"/>
-          <a:lstStyle/>
-          <a:p/>
+          <a:bodyPr rtlCol="0" anchor="ctr" wrap="square" lIns="50800" rIns="50800" tIns="25400" bIns="25400"/>
+          <a:lstStyle/>
+          <a:p>
+            <a:pPr algn="ctr"/>
+            <a:r>
+              <a:rPr sz="800" b="1">
+                <a:solidFill>
+                  <a:srgbClr val="7A45D1"/>
+                </a:solidFill>
+                <a:latin typeface="Arial"/>
+              </a:rPr>
+              <a:t>Falsifiable by construction</a:t>
+            </a:r>
+          </a:p>
         </p:txBody>
       </p:sp>
       <p:sp>
@@ -8046,8 +8052,8 @@
         </p:nvSpPr>
         <p:spPr>
           <a:xfrm>
-            <a:off x="8232647" y="5120640"/>
-            <a:ext cx="1594103" cy="658368"/>
+            <a:off x="8202168" y="5129783"/>
+            <a:ext cx="1655063" cy="566928"/>
           </a:xfrm>
           <a:prstGeom prst="rect">
             <a:avLst/>
@@ -8062,25 +8068,9 @@
           <a:p>
             <a:pPr algn="ctr"/>
             <a:r>
-              <a:rPr sz="800" b="1">
-                <a:solidFill>
-                  <a:srgbClr val="7A45D1"/>
-                </a:solidFill>
-                <a:latin typeface="Arial"/>
-              </a:rPr>
-              <a:t>Falsifiable by construction</a:t>
-            </a:r>
-          </a:p>
-          <a:p>
-            <a:pPr algn="ctr">
-              <a:spcBef>
-                <a:spcPts val="100"/>
-              </a:spcBef>
-            </a:pPr>
-            <a:r>
-              <a:rPr sz="700" b="0">
-                <a:solidFill>
-                  <a:srgbClr val="7A45D1"/>
+              <a:rPr sz="750" b="0">
+                <a:solidFill>
+                  <a:srgbClr val="5A6478"/>
                 </a:solidFill>
                 <a:latin typeface="Arial"/>
               </a:rPr>
@@ -8097,8 +8087,8 @@
         </p:nvSpPr>
         <p:spPr>
           <a:xfrm>
-            <a:off x="9790176" y="4617720"/>
-            <a:ext cx="1959863" cy="457200"/>
+            <a:off x="9838944" y="4617720"/>
+            <a:ext cx="1911095" cy="457200"/>
           </a:xfrm>
           <a:prstGeom prst="roundRect">
             <a:avLst/>
@@ -8126,9 +8116,20 @@
           </a:fontRef>
         </p:style>
         <p:txBody>
-          <a:bodyPr rtlCol="0" anchor="ctr"/>
-          <a:lstStyle/>
-          <a:p/>
+          <a:bodyPr rtlCol="0" anchor="ctr" wrap="square" lIns="50800" rIns="50800" tIns="25400" bIns="25400"/>
+          <a:lstStyle/>
+          <a:p>
+            <a:pPr algn="ctr"/>
+            <a:r>
+              <a:rPr sz="800" b="1">
+                <a:solidFill>
+                  <a:srgbClr val="77933C"/>
+                </a:solidFill>
+                <a:latin typeface="Arial"/>
+              </a:rPr>
+              <a:t>Runs offline on a CPU</a:t>
+            </a:r>
+          </a:p>
         </p:txBody>
       </p:sp>
       <p:sp>
@@ -8139,8 +8140,8 @@
         </p:nvSpPr>
         <p:spPr>
           <a:xfrm>
-            <a:off x="9973056" y="5120640"/>
-            <a:ext cx="1594103" cy="658368"/>
+            <a:off x="9966960" y="5129783"/>
+            <a:ext cx="1655063" cy="566928"/>
           </a:xfrm>
           <a:prstGeom prst="rect">
             <a:avLst/>
@@ -8155,25 +8156,9 @@
           <a:p>
             <a:pPr algn="ctr"/>
             <a:r>
-              <a:rPr sz="800" b="1">
-                <a:solidFill>
-                  <a:srgbClr val="77933C"/>
-                </a:solidFill>
-                <a:latin typeface="Arial"/>
-              </a:rPr>
-              <a:t>Runs offline on a CPU</a:t>
-            </a:r>
-          </a:p>
-          <a:p>
-            <a:pPr algn="ctr">
-              <a:spcBef>
-                <a:spcPts val="100"/>
-              </a:spcBef>
-            </a:pPr>
-            <a:r>
-              <a:rPr sz="700" b="0">
-                <a:solidFill>
-                  <a:srgbClr val="77933C"/>
+              <a:rPr sz="750" b="0">
+                <a:solidFill>
+                  <a:srgbClr val="5A6478"/>
                 </a:solidFill>
                 <a:latin typeface="Arial"/>
               </a:rPr>
@@ -11593,7 +11578,7 @@
       </p:sp>
       <p:pic>
         <p:nvPicPr>
-          <p:cNvPr id="17425" name="Picture 17424" descr="g-topology.png"/>
+          <p:cNvPr id="17425" name="Picture 17424" descr="g-topology-crop.png"/>
           <p:cNvPicPr>
             <a:picLocks noChangeAspect="1"/>
           </p:cNvPicPr>
@@ -11607,8 +11592,8 @@
         </p:blipFill>
         <p:spPr>
           <a:xfrm>
-            <a:off x="1356890" y="3474720"/>
-            <a:ext cx="3595579" cy="2432304"/>
+            <a:off x="1194216" y="3474720"/>
+            <a:ext cx="3920927" cy="2432304"/>
           </a:xfrm>
           <a:prstGeom prst="rect">
             <a:avLst/>
@@ -12676,7 +12661,7 @@
         </p:nvSpPr>
         <p:spPr>
           <a:xfrm>
-            <a:off x="6263640" y="5285231"/>
+            <a:off x="6263640" y="5010912"/>
             <a:ext cx="5486399" cy="402336"/>
           </a:xfrm>
           <a:prstGeom prst="roundRect">
@@ -12730,8 +12715,8 @@
           <p:nvPr/>
         </p:nvGraphicFramePr>
         <p:xfrm>
-          <a:off x="6263640" y="5705856"/>
-          <a:ext cx="5522976" cy="512064"/>
+          <a:off x="6263640" y="5431536"/>
+          <a:ext cx="5522976" cy="603504"/>
         </p:xfrm>
         <a:graphic>
           <a:graphicData uri="http://schemas.openxmlformats.org/drawingml/2006/table">
@@ -12746,7 +12731,7 @@
                 <a:gridCol w="877824"/>
                 <a:gridCol w="877824"/>
               </a:tblGrid>
-              <a:tr h="170688">
+              <a:tr h="201168">
                 <a:tc>
                   <a:txBody>
                     <a:bodyPr wrap="square"/>
@@ -12863,7 +12848,7 @@
                   </a:tcPr>
                 </a:tc>
               </a:tr>
-              <a:tr h="170688">
+              <a:tr h="201168">
                 <a:tc>
                   <a:txBody>
                     <a:bodyPr wrap="square"/>
@@ -12980,7 +12965,7 @@
                   </a:tcPr>
                 </a:tc>
               </a:tr>
-              <a:tr h="170688">
+              <a:tr h="201168">
                 <a:tc>
                   <a:txBody>
                     <a:bodyPr wrap="square"/>
